--- a/test/O2_Query_Flow.pptx
+++ b/test/O2_Query_Flow.pptx
@@ -4341,8 +4341,9 @@
                   <a:srgbClr val="175CA6"/>
                 </a:solidFill>
               </a:rPr>
-              <a:t>prompt +
-snapshot</a:t>
+              <a:t>SYSTEM_PROMPT
++ snapshot
++ history</a:t>
             </a:r>
           </a:p>
         </p:txBody>
@@ -6028,7 +6029,7 @@
                   <a:srgbClr val="444444"/>
                 </a:solidFill>
               </a:rPr>
-              <a:t>HTTP POST {session, message} to Orchestrator /chat</a:t>
+              <a:t>HTTP POST {session_id, message} → Orchestrator /chat  (pure stdlib urllib; --session flag)</a:t>
             </a:r>
           </a:p>
         </p:txBody>
@@ -6220,7 +6221,7 @@
                   <a:srgbClr val="444444"/>
                 </a:solidFill>
               </a:rPr>
-              <a:t>Injects live network snapshot; calls Gemini</a:t>
+              <a:t>Calls build_network_context() → GET /network; appends snapshot to SYSTEM_PROMPT; sends to Gemini</a:t>
             </a:r>
           </a:p>
         </p:txBody>
@@ -6412,7 +6413,7 @@
                   <a:srgbClr val="444444"/>
                 </a:solidFill>
               </a:rPr>
-              <a:t>Tool call 1: query_network() — get live PRB data</a:t>
+              <a:t>Tool call 1: query_network()  [while True loop, iteration 1]</a:t>
             </a:r>
           </a:p>
         </p:txBody>
@@ -6604,7 +6605,7 @@
                   <a:srgbClr val="444444"/>
                 </a:solidFill>
               </a:rPr>
-              <a:t>GET /network on Controller</a:t>
+              <a:t>GET /network → Controller; yields *[calling tool: query_network...]* inline</a:t>
             </a:r>
           </a:p>
         </p:txBody>
@@ -6796,7 +6797,7 @@
                   <a:srgbClr val="444444"/>
                 </a:solidFill>
               </a:rPr>
-              <a:t>Reads topology.json + InfluxDB PRB per cell</a:t>
+              <a:t>Reads topology.json + InfluxDB PRB per cell; returns 30-cell snapshot</a:t>
             </a:r>
           </a:p>
         </p:txBody>
@@ -6895,7 +6896,7 @@
             <a:avLst/>
           </a:prstGeom>
           <a:solidFill>
-            <a:srgbClr val="007E8A"/>
+            <a:srgbClr val="0A2955"/>
           </a:solidFill>
           <a:ln w="3810">
             <a:solidFill>
@@ -6954,7 +6955,7 @@
                   <a:srgbClr val="FFFFFF"/>
                 </a:solidFill>
               </a:rPr>
-              <a:t>Controller</a:t>
+              <a:t>Orchestrator</a:t>
             </a:r>
           </a:p>
         </p:txBody>
@@ -6988,7 +6989,7 @@
                   <a:srgbClr val="444444"/>
                 </a:solidFill>
               </a:rPr>
-              <a:t>Returns full 30-cell network snapshot</a:t>
+              <a:t>JSON-sanitises; appends FunctionResponse to session history; re-calls Gemini [loop iteration 2]</a:t>
             </a:r>
           </a:p>
         </p:txBody>
@@ -7087,7 +7088,7 @@
             <a:avLst/>
           </a:prstGeom>
           <a:solidFill>
-            <a:srgbClr val="0A2955"/>
+            <a:srgbClr val="5A238C"/>
           </a:solidFill>
           <a:ln w="3810">
             <a:solidFill>
@@ -7146,7 +7147,7 @@
                   <a:srgbClr val="FFFFFF"/>
                 </a:solidFill>
               </a:rPr>
-              <a:t>Orchestrator</a:t>
+              <a:t>Gemini LLM</a:t>
             </a:r>
           </a:p>
         </p:txBody>
@@ -7180,7 +7181,7 @@
                   <a:srgbClr val="444444"/>
                 </a:solidFill>
               </a:rPr>
-              <a:t>Returns snapshot to Gemini</a:t>
+              <a:t>Ranks cells by prb_dl_pct (desc) → most overloaded cell identified</a:t>
             </a:r>
           </a:p>
         </p:txBody>
@@ -7372,7 +7373,7 @@
                   <a:srgbClr val="444444"/>
                 </a:solidFill>
               </a:rPr>
-              <a:t>Ranks cells by prb_dl_pct (desc) → identifies most overloaded</a:t>
+              <a:t>Ranks DUs by avg PRB (asc) → lightest target DU identified</a:t>
             </a:r>
           </a:p>
         </p:txBody>
@@ -7564,7 +7565,7 @@
                   <a:srgbClr val="444444"/>
                 </a:solidFill>
               </a:rPr>
-              <a:t>Ranks DUs by avg PRB (asc) → identifies lightest target DU</a:t>
+              <a:t>Tool call 2: move_cell(cell_id=X, target_du_id=Y)</a:t>
             </a:r>
           </a:p>
         </p:txBody>
@@ -7663,7 +7664,7 @@
             <a:avLst/>
           </a:prstGeom>
           <a:solidFill>
-            <a:srgbClr val="5A238C"/>
+            <a:srgbClr val="0A2955"/>
           </a:solidFill>
           <a:ln w="3810">
             <a:solidFill>
@@ -7722,7 +7723,7 @@
                   <a:srgbClr val="FFFFFF"/>
                 </a:solidFill>
               </a:rPr>
-              <a:t>Gemini LLM</a:t>
+              <a:t>Orchestrator</a:t>
             </a:r>
           </a:p>
         </p:txBody>
@@ -7756,7 +7757,7 @@
                   <a:srgbClr val="444444"/>
                 </a:solidFill>
               </a:rPr>
-              <a:t>Tool call 2: move_cell(cell_id=X, target_du_id=Y)</a:t>
+              <a:t>POST /move/cell on Controller; yields *[calling tool: move_cell...]* inline</a:t>
             </a:r>
           </a:p>
         </p:txBody>
@@ -7855,7 +7856,7 @@
             <a:avLst/>
           </a:prstGeom>
           <a:solidFill>
-            <a:srgbClr val="0A2955"/>
+            <a:srgbClr val="007E8A"/>
           </a:solidFill>
           <a:ln w="3810">
             <a:solidFill>
@@ -7914,7 +7915,7 @@
                   <a:srgbClr val="FFFFFF"/>
                 </a:solidFill>
               </a:rPr>
-              <a:t>Orchestrator</a:t>
+              <a:t>Controller</a:t>
             </a:r>
           </a:p>
         </p:txBody>
@@ -7948,7 +7949,7 @@
                   <a:srgbClr val="444444"/>
                 </a:solidFill>
               </a:rPr>
-              <a:t>POST /move/cell on Controller</a:t>
+              <a:t>Atomically updates topology.json (.tmp → rename); DU simulators reload in 5 s</a:t>
             </a:r>
           </a:p>
         </p:txBody>
@@ -8047,7 +8048,7 @@
             <a:avLst/>
           </a:prstGeom>
           <a:solidFill>
-            <a:srgbClr val="007E8A"/>
+            <a:srgbClr val="0A2955"/>
           </a:solidFill>
           <a:ln w="3810">
             <a:solidFill>
@@ -8106,7 +8107,7 @@
                   <a:srgbClr val="FFFFFF"/>
                 </a:solidFill>
               </a:rPr>
-              <a:t>Controller</a:t>
+              <a:t>Orchestrator</a:t>
             </a:r>
           </a:p>
         </p:txBody>
@@ -8140,7 +8141,7 @@
                   <a:srgbClr val="444444"/>
                 </a:solidFill>
               </a:rPr>
-              <a:t>Atomically updates topology.json</a:t>
+              <a:t>JSON-sanitises move result; appends to history; re-calls Gemini → loop exits (no more tools)</a:t>
             </a:r>
           </a:p>
         </p:txBody>
@@ -8239,7 +8240,7 @@
             <a:avLst/>
           </a:prstGeom>
           <a:solidFill>
-            <a:srgbClr val="007E8A"/>
+            <a:srgbClr val="5A238C"/>
           </a:solidFill>
           <a:ln w="3810">
             <a:solidFill>
@@ -8298,7 +8299,7 @@
                   <a:srgbClr val="FFFFFF"/>
                 </a:solidFill>
               </a:rPr>
-              <a:t>Controller</a:t>
+              <a:t>Gemini LLM</a:t>
             </a:r>
           </a:p>
         </p:txBody>
@@ -8332,7 +8333,7 @@
                   <a:srgbClr val="444444"/>
                 </a:solidFill>
               </a:rPr>
-              <a:t>Returns move confirmation</a:t>
+              <a:t>Generates reply: cell moved, from/to DU, expected PRB improvement</a:t>
             </a:r>
           </a:p>
         </p:txBody>
@@ -8431,198 +8432,6 @@
             <a:avLst/>
           </a:prstGeom>
           <a:solidFill>
-            <a:srgbClr val="5A238C"/>
-          </a:solidFill>
-          <a:ln w="3810">
-            <a:solidFill>
-              <a:srgbClr val="AAAAAA"/>
-            </a:solidFill>
-          </a:ln>
-        </p:spPr>
-        <p:style>
-          <a:lnRef idx="1">
-            <a:schemeClr val="accent1"/>
-          </a:lnRef>
-          <a:fillRef idx="3">
-            <a:schemeClr val="accent1"/>
-          </a:fillRef>
-          <a:effectRef idx="2">
-            <a:schemeClr val="accent1"/>
-          </a:effectRef>
-          <a:fontRef idx="minor">
-            <a:schemeClr val="lt1"/>
-          </a:fontRef>
-        </p:style>
-        <p:txBody>
-          <a:bodyPr rtlCol="0" anchor="ctr"/>
-          <a:lstStyle/>
-          <a:p>
-            <a:pPr algn="ctr"/>
-          </a:p>
-        </p:txBody>
-      </p:sp>
-      <p:sp>
-        <p:nvSpPr>
-          <p:cNvPr id="78" name="TextBox 77"/>
-          <p:cNvSpPr txBox="1"/>
-          <p:nvPr/>
-        </p:nvSpPr>
-        <p:spPr>
-          <a:xfrm>
-            <a:off x="868680" y="6611112"/>
-            <a:ext cx="1463040" cy="274320"/>
-          </a:xfrm>
-          <a:prstGeom prst="rect">
-            <a:avLst/>
-          </a:prstGeom>
-          <a:noFill/>
-        </p:spPr>
-        <p:txBody>
-          <a:bodyPr wrap="square">
-            <a:spAutoFit/>
-          </a:bodyPr>
-          <a:lstStyle/>
-          <a:p>
-            <a:pPr algn="ctr"/>
-            <a:r>
-              <a:rPr sz="900" b="1" i="0">
-                <a:solidFill>
-                  <a:srgbClr val="FFFFFF"/>
-                </a:solidFill>
-              </a:rPr>
-              <a:t>Gemini LLM</a:t>
-            </a:r>
-          </a:p>
-        </p:txBody>
-      </p:sp>
-      <p:sp>
-        <p:nvSpPr>
-          <p:cNvPr id="79" name="TextBox 78"/>
-          <p:cNvSpPr txBox="1"/>
-          <p:nvPr/>
-        </p:nvSpPr>
-        <p:spPr>
-          <a:xfrm>
-            <a:off x="2423160" y="6583680"/>
-            <a:ext cx="9418320" cy="329184"/>
-          </a:xfrm>
-          <a:prstGeom prst="rect">
-            <a:avLst/>
-          </a:prstGeom>
-          <a:noFill/>
-        </p:spPr>
-        <p:txBody>
-          <a:bodyPr wrap="square">
-            <a:spAutoFit/>
-          </a:bodyPr>
-          <a:lstStyle/>
-          <a:p>
-            <a:pPr algn="l"/>
-            <a:r>
-              <a:rPr sz="1000" b="0" i="0">
-                <a:solidFill>
-                  <a:srgbClr val="444444"/>
-                </a:solidFill>
-              </a:rPr>
-              <a:t>Generates reply: cell moved, from/to DU, expected improvement</a:t>
-            </a:r>
-          </a:p>
-        </p:txBody>
-      </p:sp>
-      <p:sp>
-        <p:nvSpPr>
-          <p:cNvPr id="80" name="Rectangle 79"/>
-          <p:cNvSpPr/>
-          <p:nvPr/>
-        </p:nvSpPr>
-        <p:spPr>
-          <a:xfrm>
-            <a:off x="274320" y="6949440"/>
-            <a:ext cx="11612880" cy="402336"/>
-          </a:xfrm>
-          <a:prstGeom prst="rect">
-            <a:avLst/>
-          </a:prstGeom>
-          <a:solidFill>
-            <a:srgbClr val="E8ECF2"/>
-          </a:solidFill>
-          <a:ln w="3810">
-            <a:solidFill>
-              <a:srgbClr val="CCCCCC"/>
-            </a:solidFill>
-          </a:ln>
-        </p:spPr>
-        <p:style>
-          <a:lnRef idx="1">
-            <a:schemeClr val="accent1"/>
-          </a:lnRef>
-          <a:fillRef idx="3">
-            <a:schemeClr val="accent1"/>
-          </a:fillRef>
-          <a:effectRef idx="2">
-            <a:schemeClr val="accent1"/>
-          </a:effectRef>
-          <a:fontRef idx="minor">
-            <a:schemeClr val="lt1"/>
-          </a:fontRef>
-        </p:style>
-        <p:txBody>
-          <a:bodyPr rtlCol="0" anchor="ctr"/>
-          <a:lstStyle/>
-          <a:p>
-            <a:pPr algn="ctr"/>
-          </a:p>
-        </p:txBody>
-      </p:sp>
-      <p:sp>
-        <p:nvSpPr>
-          <p:cNvPr id="81" name="TextBox 80"/>
-          <p:cNvSpPr txBox="1"/>
-          <p:nvPr/>
-        </p:nvSpPr>
-        <p:spPr>
-          <a:xfrm>
-            <a:off x="320040" y="6986016"/>
-            <a:ext cx="502920" cy="329184"/>
-          </a:xfrm>
-          <a:prstGeom prst="rect">
-            <a:avLst/>
-          </a:prstGeom>
-          <a:noFill/>
-        </p:spPr>
-        <p:txBody>
-          <a:bodyPr wrap="square">
-            <a:spAutoFit/>
-          </a:bodyPr>
-          <a:lstStyle/>
-          <a:p>
-            <a:pPr algn="ctr"/>
-            <a:r>
-              <a:rPr sz="1100" b="1" i="0">
-                <a:solidFill>
-                  <a:srgbClr val="0A2955"/>
-                </a:solidFill>
-              </a:rPr>
-              <a:t>16</a:t>
-            </a:r>
-          </a:p>
-        </p:txBody>
-      </p:sp>
-      <p:sp>
-        <p:nvSpPr>
-          <p:cNvPr id="82" name="Rectangle 81"/>
-          <p:cNvSpPr/>
-          <p:nvPr/>
-        </p:nvSpPr>
-        <p:spPr>
-          <a:xfrm>
-            <a:off x="868680" y="7013448"/>
-            <a:ext cx="1463040" cy="274320"/>
-          </a:xfrm>
-          <a:prstGeom prst="rect">
-            <a:avLst/>
-          </a:prstGeom>
-          <a:solidFill>
             <a:srgbClr val="0A2955"/>
           </a:solidFill>
           <a:ln w="3810">
@@ -8655,13 +8464,13 @@
       </p:sp>
       <p:sp>
         <p:nvSpPr>
-          <p:cNvPr id="83" name="TextBox 82"/>
+          <p:cNvPr id="78" name="TextBox 77"/>
           <p:cNvSpPr txBox="1"/>
           <p:nvPr/>
         </p:nvSpPr>
         <p:spPr>
           <a:xfrm>
-            <a:off x="868680" y="7013448"/>
+            <a:off x="868680" y="6611112"/>
             <a:ext cx="1463040" cy="274320"/>
           </a:xfrm>
           <a:prstGeom prst="rect">
@@ -8689,13 +8498,13 @@
       </p:sp>
       <p:sp>
         <p:nvSpPr>
-          <p:cNvPr id="84" name="TextBox 83"/>
+          <p:cNvPr id="79" name="TextBox 78"/>
           <p:cNvSpPr txBox="1"/>
           <p:nvPr/>
         </p:nvSpPr>
         <p:spPr>
           <a:xfrm>
-            <a:off x="2423160" y="6986016"/>
+            <a:off x="2423160" y="6583680"/>
             <a:ext cx="9418320" cy="329184"/>
           </a:xfrm>
           <a:prstGeom prst="rect">
@@ -8716,7 +8525,7 @@
                   <a:srgbClr val="444444"/>
                 </a:solidFill>
               </a:rPr>
-              <a:t>Returns HTTP response {reply} to chat.py</a:t>
+              <a:t>Streams text/plain chunks via sync generator (StreamingResponse)</a:t>
             </a:r>
           </a:p>
         </p:txBody>
